--- a/分析ワークシート_戦国の世から天下統一へ.pptx
+++ b/分析ワークシート_戦国の世から天下統一へ.pptx
@@ -966,124 +966,18 @@
       </p:grpSpPr>
       <p:sp>
         <p:nvSpPr>
-          <p:cNvPr id="2" name="Text 0"/>
-          <p:cNvSpPr txBox="1"/>
-          <p:nvPr/>
-        </p:nvSpPr>
-        <p:spPr>
-          <a:xfrm>
-            <a:off x="365760" y="201168"/>
-            <a:ext cx="5943600" cy="384048"/>
-          </a:xfrm>
-          <a:prstGeom prst="rect">
-            <a:avLst/>
-          </a:prstGeom>
-          <a:noFill/>
-          <a:ln/>
-        </p:spPr>
-        <p:txBody>
-          <a:bodyPr wrap="square" lIns="0" tIns="0" rIns="0" bIns="0" rtlCol="0" anchor="ctr"/>
-          <a:lstStyle/>
-          <a:p>
-            <a:pPr indent="0" marL="0">
-              <a:buNone/>
-            </a:pPr>
-            <a:r>
-              <a:rPr lang="en-US" sz="1600" b="1" dirty="0">
-                <a:solidFill>
-                  <a:srgbClr val="333333"/>
-                </a:solidFill>
-              </a:rPr>
-              <a:t>戦国の世から天下統一へ　</a:t>
-            </a:r>
-            <a:pPr indent="0" marL="0">
-              <a:buNone/>
-            </a:pPr>
-            <a:r>
-              <a:rPr lang="en-US" sz="1300" dirty="0">
-                <a:solidFill>
-                  <a:srgbClr val="333333"/>
-                </a:solidFill>
-              </a:rPr>
-              <a:t>分析ワークシート（1／2）</a:t>
-            </a:r>
-            <a:endParaRPr lang="en-US" sz="1600" dirty="0"/>
-          </a:p>
-        </p:txBody>
-      </p:sp>
-      <p:sp>
-        <p:nvSpPr>
-          <p:cNvPr id="3" name="Text 1"/>
-          <p:cNvSpPr txBox="1"/>
-          <p:nvPr/>
-        </p:nvSpPr>
-        <p:spPr>
-          <a:xfrm>
-            <a:off x="6309360" y="201168"/>
-            <a:ext cx="4014216" cy="384048"/>
-          </a:xfrm>
-          <a:prstGeom prst="rect">
-            <a:avLst/>
-          </a:prstGeom>
-          <a:noFill/>
-          <a:ln/>
-        </p:spPr>
-        <p:txBody>
-          <a:bodyPr wrap="square" lIns="0" tIns="0" rIns="0" bIns="0" rtlCol="0" anchor="ctr"/>
-          <a:lstStyle/>
-          <a:p>
-            <a:pPr indent="0" marL="0">
-              <a:buNone/>
-            </a:pPr>
-            <a:r>
-              <a:rPr lang="en-US" sz="1300" dirty="0">
-                <a:solidFill>
-                  <a:srgbClr val="333333"/>
-                </a:solidFill>
-              </a:rPr>
-              <a:t>6年　　組　　番　名前</a:t>
-            </a:r>
-            <a:endParaRPr lang="en-US" sz="1300" dirty="0"/>
-          </a:p>
-        </p:txBody>
-      </p:sp>
-      <p:sp>
-        <p:nvSpPr>
-          <p:cNvPr id="4" name="Shape 2"/>
+          <p:cNvPr id="2" name="Shape 0"/>
           <p:cNvSpPr/>
           <p:nvPr/>
         </p:nvSpPr>
         <p:spPr>
           <a:xfrm>
-            <a:off x="8001000" y="548640"/>
-            <a:ext cx="2322576" cy="0"/>
-          </a:xfrm>
-          <a:prstGeom prst="line">
-            <a:avLst/>
-          </a:prstGeom>
-          <a:noFill/>
-          <a:ln w="9525">
-            <a:solidFill>
-              <a:srgbClr val="666666"/>
-            </a:solidFill>
-            <a:prstDash val="solid"/>
-          </a:ln>
-        </p:spPr>
-      </p:sp>
-      <p:sp>
-        <p:nvSpPr>
-          <p:cNvPr id="5" name="Shape 3"/>
-          <p:cNvSpPr/>
-          <p:nvPr/>
-        </p:nvSpPr>
-        <p:spPr>
-          <a:xfrm>
-            <a:off x="2020824" y="713232"/>
-            <a:ext cx="3108960" cy="658368"/>
+            <a:off x="1051560" y="137160"/>
+            <a:ext cx="3561588" cy="548640"/>
           </a:xfrm>
           <a:prstGeom prst="roundRect">
             <a:avLst>
-              <a:gd name="adj" fmla="val 11111"/>
+              <a:gd name="adj" fmla="val 13333"/>
             </a:avLst>
           </a:prstGeom>
           <a:solidFill>
@@ -1099,7 +993,7 @@
       </p:sp>
       <p:pic>
         <p:nvPicPr>
-          <p:cNvPr id="6" name="Image 0" descr="preencoded.png">    </p:cNvPr>
+          <p:cNvPr id="3" name="Image 0" descr="preencoded.png">    </p:cNvPr>
           <p:cNvPicPr>
             <a:picLocks noChangeAspect="1"/>
           </p:cNvPicPr>
@@ -1113,8 +1007,8 @@
         </p:blipFill>
         <p:spPr>
           <a:xfrm>
-            <a:off x="2295144" y="786384"/>
-            <a:ext cx="512064" cy="512064"/>
+            <a:off x="1280160" y="192024"/>
+            <a:ext cx="438912" cy="438912"/>
           </a:xfrm>
           <a:prstGeom prst="rect">
             <a:avLst/>
@@ -1123,14 +1017,14 @@
       </p:pic>
       <p:sp>
         <p:nvSpPr>
-          <p:cNvPr id="7" name="Text 4"/>
+          <p:cNvPr id="4" name="Text 1"/>
           <p:cNvSpPr txBox="1"/>
           <p:nvPr/>
         </p:nvSpPr>
         <p:spPr>
           <a:xfrm>
-            <a:off x="2889504" y="713232"/>
-            <a:ext cx="2103120" cy="658368"/>
+            <a:off x="1828800" y="137160"/>
+            <a:ext cx="2555748" cy="548640"/>
           </a:xfrm>
           <a:prstGeom prst="rect">
             <a:avLst/>
@@ -1159,18 +1053,18 @@
       </p:sp>
       <p:sp>
         <p:nvSpPr>
-          <p:cNvPr id="8" name="Shape 5"/>
+          <p:cNvPr id="5" name="Shape 2"/>
           <p:cNvSpPr/>
           <p:nvPr/>
         </p:nvSpPr>
         <p:spPr>
           <a:xfrm>
-            <a:off x="5184648" y="713232"/>
-            <a:ext cx="2139696" cy="658368"/>
+            <a:off x="4658868" y="137160"/>
+            <a:ext cx="2286000" cy="548640"/>
           </a:xfrm>
           <a:prstGeom prst="roundRect">
             <a:avLst>
-              <a:gd name="adj" fmla="val 11111"/>
+              <a:gd name="adj" fmla="val 13333"/>
             </a:avLst>
           </a:prstGeom>
           <a:solidFill>
@@ -1186,14 +1080,14 @@
       </p:sp>
       <p:sp>
         <p:nvSpPr>
-          <p:cNvPr id="9" name="Text 6"/>
+          <p:cNvPr id="6" name="Text 3"/>
           <p:cNvSpPr txBox="1"/>
           <p:nvPr/>
         </p:nvSpPr>
         <p:spPr>
           <a:xfrm>
-            <a:off x="5184648" y="749808"/>
-            <a:ext cx="2139696" cy="384048"/>
+            <a:off x="4658868" y="137160"/>
+            <a:ext cx="2286000" cy="548640"/>
           </a:xfrm>
           <a:prstGeom prst="rect">
             <a:avLst/>
@@ -1222,54 +1116,18 @@
       </p:sp>
       <p:sp>
         <p:nvSpPr>
-          <p:cNvPr id="10" name="Text 7"/>
-          <p:cNvSpPr txBox="1"/>
-          <p:nvPr/>
-        </p:nvSpPr>
-        <p:spPr>
-          <a:xfrm>
-            <a:off x="5184648" y="1097280"/>
-            <a:ext cx="2139696" cy="237744"/>
-          </a:xfrm>
-          <a:prstGeom prst="rect">
-            <a:avLst/>
-          </a:prstGeom>
-          <a:noFill/>
-          <a:ln/>
-        </p:spPr>
-        <p:txBody>
-          <a:bodyPr wrap="square" lIns="0" tIns="0" rIns="0" bIns="0" rtlCol="0" anchor="ctr"/>
-          <a:lstStyle/>
-          <a:p>
-            <a:pPr algn="ctr" indent="0" marL="0">
-              <a:buNone/>
-            </a:pPr>
-            <a:r>
-              <a:rPr lang="en-US" sz="1100" dirty="0">
-                <a:solidFill>
-                  <a:srgbClr val="7A5A00"/>
-                </a:solidFill>
-              </a:rPr>
-              <a:t>同じところ・ちがうところ</a:t>
-            </a:r>
-            <a:endParaRPr lang="en-US" sz="1100" dirty="0"/>
-          </a:p>
-        </p:txBody>
-      </p:sp>
-      <p:sp>
-        <p:nvSpPr>
-          <p:cNvPr id="11" name="Shape 8"/>
+          <p:cNvPr id="7" name="Shape 4"/>
           <p:cNvSpPr/>
           <p:nvPr/>
         </p:nvSpPr>
         <p:spPr>
           <a:xfrm>
-            <a:off x="7379208" y="713232"/>
-            <a:ext cx="2944368" cy="658368"/>
+            <a:off x="6990588" y="137160"/>
+            <a:ext cx="3561588" cy="548640"/>
           </a:xfrm>
           <a:prstGeom prst="roundRect">
             <a:avLst>
-              <a:gd name="adj" fmla="val 11111"/>
+              <a:gd name="adj" fmla="val 13333"/>
             </a:avLst>
           </a:prstGeom>
           <a:solidFill>
@@ -1285,7 +1143,7 @@
       </p:sp>
       <p:pic>
         <p:nvPicPr>
-          <p:cNvPr id="12" name="Image 1" descr="preencoded.png">    </p:cNvPr>
+          <p:cNvPr id="8" name="Image 1" descr="preencoded.png">    </p:cNvPr>
           <p:cNvPicPr>
             <a:picLocks noChangeAspect="1"/>
           </p:cNvPicPr>
@@ -1299,8 +1157,8 @@
         </p:blipFill>
         <p:spPr>
           <a:xfrm>
-            <a:off x="7653528" y="786384"/>
-            <a:ext cx="512064" cy="512064"/>
+            <a:off x="7219188" y="192024"/>
+            <a:ext cx="438912" cy="438912"/>
           </a:xfrm>
           <a:prstGeom prst="rect">
             <a:avLst/>
@@ -1309,14 +1167,14 @@
       </p:pic>
       <p:sp>
         <p:nvSpPr>
-          <p:cNvPr id="13" name="Text 9"/>
+          <p:cNvPr id="9" name="Text 5"/>
           <p:cNvSpPr txBox="1"/>
           <p:nvPr/>
         </p:nvSpPr>
         <p:spPr>
           <a:xfrm>
-            <a:off x="8247888" y="713232"/>
-            <a:ext cx="1938528" cy="658368"/>
+            <a:off x="7767828" y="137160"/>
+            <a:ext cx="2555748" cy="548640"/>
           </a:xfrm>
           <a:prstGeom prst="rect">
             <a:avLst/>
@@ -1345,18 +1203,18 @@
       </p:sp>
       <p:sp>
         <p:nvSpPr>
-          <p:cNvPr id="14" name="Shape 10"/>
+          <p:cNvPr id="10" name="Shape 6"/>
           <p:cNvSpPr/>
           <p:nvPr/>
         </p:nvSpPr>
         <p:spPr>
           <a:xfrm>
-            <a:off x="365760" y="1463040"/>
-            <a:ext cx="1600200" cy="1865376"/>
+            <a:off x="137160" y="731520"/>
+            <a:ext cx="868680" cy="2200656"/>
           </a:xfrm>
           <a:prstGeom prst="roundRect">
             <a:avLst>
-              <a:gd name="adj" fmla="val 4571"/>
+              <a:gd name="adj" fmla="val 8421"/>
             </a:avLst>
           </a:prstGeom>
           <a:solidFill>
@@ -1372,7 +1230,7 @@
       </p:sp>
       <p:pic>
         <p:nvPicPr>
-          <p:cNvPr id="15" name="Image 2" descr="preencoded.png">    </p:cNvPr>
+          <p:cNvPr id="11" name="Image 2" descr="preencoded.png">    </p:cNvPr>
           <p:cNvPicPr>
             <a:picLocks noChangeAspect="1"/>
           </p:cNvPicPr>
@@ -1386,8 +1244,8 @@
         </p:blipFill>
         <p:spPr>
           <a:xfrm>
-            <a:off x="891540" y="1627632"/>
-            <a:ext cx="548640" cy="548640"/>
+            <a:off x="342900" y="868680"/>
+            <a:ext cx="457200" cy="457200"/>
           </a:xfrm>
           <a:prstGeom prst="rect">
             <a:avLst/>
@@ -1396,14 +1254,14 @@
       </p:pic>
       <p:sp>
         <p:nvSpPr>
-          <p:cNvPr id="16" name="Text 11"/>
+          <p:cNvPr id="12" name="Text 7"/>
           <p:cNvSpPr txBox="1"/>
           <p:nvPr/>
         </p:nvSpPr>
         <p:spPr>
           <a:xfrm>
-            <a:off x="402336" y="2240280"/>
-            <a:ext cx="1527048" cy="996696"/>
+            <a:off x="164592" y="1389888"/>
+            <a:ext cx="813816" cy="1469136"/>
           </a:xfrm>
           <a:prstGeom prst="rect">
             <a:avLst/>
@@ -1417,66 +1275,100 @@
           <a:p>
             <a:pPr algn="ctr" indent="0" marL="0">
               <a:spcAft>
-                <a:spcPts val="200"/>
+                <a:spcPts val="100"/>
               </a:spcAft>
               <a:buNone/>
             </a:pPr>
             <a:r>
-              <a:rPr lang="en-US" sz="1150" dirty="0">
+              <a:rPr lang="en-US" sz="1050" dirty="0">
                 <a:solidFill>
                   <a:srgbClr val="222222"/>
                 </a:solidFill>
               </a:rPr>
-              <a:t>①外国人に対しての</a:t>
-            </a:r>
-            <a:endParaRPr lang="en-US" sz="1150" dirty="0"/>
+              <a:t>①外国人に</a:t>
+            </a:r>
+            <a:endParaRPr lang="en-US" sz="1050" dirty="0"/>
           </a:p>
           <a:p>
             <a:pPr algn="ctr" indent="0" marL="0">
               <a:spcAft>
-                <a:spcPts val="200"/>
+                <a:spcPts val="100"/>
               </a:spcAft>
               <a:buNone/>
             </a:pPr>
             <a:r>
-              <a:rPr lang="en-US" sz="1150" dirty="0">
+              <a:rPr lang="en-US" sz="1050" dirty="0">
                 <a:solidFill>
                   <a:srgbClr val="222222"/>
                 </a:solidFill>
               </a:rPr>
-              <a:t>取り組みや考え</a:t>
-            </a:r>
-            <a:endParaRPr lang="en-US" sz="1150" dirty="0"/>
+              <a:t>対しての</a:t>
+            </a:r>
+            <a:endParaRPr lang="en-US" sz="1050" dirty="0"/>
           </a:p>
           <a:p>
             <a:pPr algn="ctr" indent="0" marL="0">
               <a:spcAft>
-                <a:spcPts val="200"/>
+                <a:spcPts val="100"/>
               </a:spcAft>
               <a:buNone/>
             </a:pPr>
             <a:r>
-              <a:rPr lang="en-US" sz="1150" b="1" dirty="0">
+              <a:rPr lang="en-US" sz="1050" dirty="0">
+                <a:solidFill>
+                  <a:srgbClr val="222222"/>
+                </a:solidFill>
+              </a:rPr>
+              <a:t>取り組みや</a:t>
+            </a:r>
+            <a:endParaRPr lang="en-US" sz="1050" dirty="0"/>
+          </a:p>
+          <a:p>
+            <a:pPr algn="ctr" indent="0" marL="0">
+              <a:spcAft>
+                <a:spcPts val="100"/>
+              </a:spcAft>
+              <a:buNone/>
+            </a:pPr>
+            <a:r>
+              <a:rPr lang="en-US" sz="1050" dirty="0">
+                <a:solidFill>
+                  <a:srgbClr val="222222"/>
+                </a:solidFill>
+              </a:rPr>
+              <a:t>考え</a:t>
+            </a:r>
+            <a:endParaRPr lang="en-US" sz="1050" dirty="0"/>
+          </a:p>
+          <a:p>
+            <a:pPr algn="ctr" indent="0" marL="0">
+              <a:spcAft>
+                <a:spcPts val="100"/>
+              </a:spcAft>
+              <a:buNone/>
+            </a:pPr>
+            <a:r>
+              <a:rPr lang="en-US" sz="1050" b="1" dirty="0">
                 <a:solidFill>
                   <a:srgbClr val="2F6DB5"/>
                 </a:solidFill>
               </a:rPr>
               <a:t>（外交）</a:t>
             </a:r>
-            <a:endParaRPr lang="en-US" sz="1150" dirty="0"/>
+            <a:endParaRPr lang="en-US" sz="1050" dirty="0"/>
           </a:p>
         </p:txBody>
       </p:sp>
       <p:sp>
         <p:nvSpPr>
-          <p:cNvPr id="17" name="Shape 12"/>
+          <p:cNvPr id="13" name="Shape 8"/>
           <p:cNvSpPr/>
           <p:nvPr/>
         </p:nvSpPr>
         <p:spPr>
           <a:xfrm>
-            <a:off x="2020824" y="1463040"/>
-            <a:ext cx="3108960" cy="1865376"/>
+            <a:off x="1051560" y="731520"/>
+            <a:ext cx="3561588" cy="2200656"/>
           </a:xfrm>
           <a:prstGeom prst="rect">
             <a:avLst/>
@@ -1494,14 +1386,14 @@
       </p:sp>
       <p:sp>
         <p:nvSpPr>
-          <p:cNvPr id="18" name="Shape 13"/>
+          <p:cNvPr id="14" name="Shape 9"/>
           <p:cNvSpPr/>
           <p:nvPr/>
         </p:nvSpPr>
         <p:spPr>
           <a:xfrm>
-            <a:off x="5184648" y="1463040"/>
-            <a:ext cx="2139696" cy="1865376"/>
+            <a:off x="4658868" y="731520"/>
+            <a:ext cx="2286000" cy="2200656"/>
           </a:xfrm>
           <a:prstGeom prst="rect">
             <a:avLst/>
@@ -1519,14 +1411,14 @@
       </p:sp>
       <p:sp>
         <p:nvSpPr>
-          <p:cNvPr id="19" name="Shape 14"/>
+          <p:cNvPr id="15" name="Shape 10"/>
           <p:cNvSpPr/>
           <p:nvPr/>
         </p:nvSpPr>
         <p:spPr>
           <a:xfrm>
-            <a:off x="7379208" y="1463040"/>
-            <a:ext cx="2944368" cy="1865376"/>
+            <a:off x="6990588" y="731520"/>
+            <a:ext cx="3561588" cy="2200656"/>
           </a:xfrm>
           <a:prstGeom prst="rect">
             <a:avLst/>
@@ -1544,113 +1436,18 @@
       </p:sp>
       <p:sp>
         <p:nvSpPr>
-          <p:cNvPr id="20" name="Text 15"/>
-          <p:cNvSpPr txBox="1"/>
-          <p:nvPr/>
-        </p:nvSpPr>
-        <p:spPr>
-          <a:xfrm>
-            <a:off x="5257800" y="1517904"/>
-            <a:ext cx="1993392" cy="219456"/>
-          </a:xfrm>
-          <a:prstGeom prst="rect">
-            <a:avLst/>
-          </a:prstGeom>
-          <a:noFill/>
-          <a:ln/>
-        </p:spPr>
-        <p:txBody>
-          <a:bodyPr wrap="square" lIns="0" tIns="0" rIns="0" bIns="0" rtlCol="0" anchor="ctr"/>
-          <a:lstStyle/>
-          <a:p>
-            <a:pPr indent="0" marL="0">
-              <a:buNone/>
-            </a:pPr>
-            <a:r>
-              <a:rPr lang="en-US" sz="1000" dirty="0">
-                <a:solidFill>
-                  <a:srgbClr val="9A8A55"/>
-                </a:solidFill>
-              </a:rPr>
-              <a:t>同じところ</a:t>
-            </a:r>
-            <a:endParaRPr lang="en-US" sz="1000" dirty="0"/>
-          </a:p>
-        </p:txBody>
-      </p:sp>
-      <p:sp>
-        <p:nvSpPr>
-          <p:cNvPr id="21" name="Shape 16"/>
+          <p:cNvPr id="16" name="Shape 11"/>
           <p:cNvSpPr/>
           <p:nvPr/>
         </p:nvSpPr>
         <p:spPr>
           <a:xfrm>
-            <a:off x="5257800" y="2395728"/>
-            <a:ext cx="1993392" cy="0"/>
-          </a:xfrm>
-          <a:prstGeom prst="line">
-            <a:avLst/>
-          </a:prstGeom>
-          <a:noFill/>
-          <a:ln w="9525">
-            <a:solidFill>
-              <a:srgbClr val="D9CC99"/>
-            </a:solidFill>
-            <a:prstDash val="dash"/>
-          </a:ln>
-        </p:spPr>
-      </p:sp>
-      <p:sp>
-        <p:nvSpPr>
-          <p:cNvPr id="22" name="Text 17"/>
-          <p:cNvSpPr txBox="1"/>
-          <p:nvPr/>
-        </p:nvSpPr>
-        <p:spPr>
-          <a:xfrm>
-            <a:off x="5257800" y="2450592"/>
-            <a:ext cx="1993392" cy="219456"/>
-          </a:xfrm>
-          <a:prstGeom prst="rect">
-            <a:avLst/>
-          </a:prstGeom>
-          <a:noFill/>
-          <a:ln/>
-        </p:spPr>
-        <p:txBody>
-          <a:bodyPr wrap="square" lIns="0" tIns="0" rIns="0" bIns="0" rtlCol="0" anchor="ctr"/>
-          <a:lstStyle/>
-          <a:p>
-            <a:pPr indent="0" marL="0">
-              <a:buNone/>
-            </a:pPr>
-            <a:r>
-              <a:rPr lang="en-US" sz="1000" dirty="0">
-                <a:solidFill>
-                  <a:srgbClr val="9A8A55"/>
-                </a:solidFill>
-              </a:rPr>
-              <a:t>ちがうところ</a:t>
-            </a:r>
-            <a:endParaRPr lang="en-US" sz="1000" dirty="0"/>
-          </a:p>
-        </p:txBody>
-      </p:sp>
-      <p:sp>
-        <p:nvSpPr>
-          <p:cNvPr id="23" name="Shape 18"/>
-          <p:cNvSpPr/>
-          <p:nvPr/>
-        </p:nvSpPr>
-        <p:spPr>
-          <a:xfrm>
-            <a:off x="365760" y="3419856"/>
-            <a:ext cx="1600200" cy="1865376"/>
+            <a:off x="137160" y="3023616"/>
+            <a:ext cx="868680" cy="2200656"/>
           </a:xfrm>
           <a:prstGeom prst="roundRect">
             <a:avLst>
-              <a:gd name="adj" fmla="val 4571"/>
+              <a:gd name="adj" fmla="val 8421"/>
             </a:avLst>
           </a:prstGeom>
           <a:solidFill>
@@ -1666,7 +1463,7 @@
       </p:sp>
       <p:pic>
         <p:nvPicPr>
-          <p:cNvPr id="24" name="Image 3" descr="preencoded.png">    </p:cNvPr>
+          <p:cNvPr id="17" name="Image 3" descr="preencoded.png">    </p:cNvPr>
           <p:cNvPicPr>
             <a:picLocks noChangeAspect="1"/>
           </p:cNvPicPr>
@@ -1680,8 +1477,8 @@
         </p:blipFill>
         <p:spPr>
           <a:xfrm>
-            <a:off x="891540" y="3584448"/>
-            <a:ext cx="548640" cy="548640"/>
+            <a:off x="342900" y="3160776"/>
+            <a:ext cx="457200" cy="457200"/>
           </a:xfrm>
           <a:prstGeom prst="rect">
             <a:avLst/>
@@ -1690,14 +1487,14 @@
       </p:pic>
       <p:sp>
         <p:nvSpPr>
-          <p:cNvPr id="25" name="Text 19"/>
+          <p:cNvPr id="18" name="Text 12"/>
           <p:cNvSpPr txBox="1"/>
           <p:nvPr/>
         </p:nvSpPr>
         <p:spPr>
           <a:xfrm>
-            <a:off x="402336" y="4197096"/>
-            <a:ext cx="1527048" cy="996696"/>
+            <a:off x="164592" y="3681984"/>
+            <a:ext cx="813816" cy="1469136"/>
           </a:xfrm>
           <a:prstGeom prst="rect">
             <a:avLst/>
@@ -1711,66 +1508,100 @@
           <a:p>
             <a:pPr algn="ctr" indent="0" marL="0">
               <a:spcAft>
-                <a:spcPts val="200"/>
+                <a:spcPts val="100"/>
               </a:spcAft>
               <a:buNone/>
             </a:pPr>
             <a:r>
-              <a:rPr lang="en-US" sz="1150" dirty="0">
+              <a:rPr lang="en-US" sz="1050" dirty="0">
                 <a:solidFill>
                   <a:srgbClr val="222222"/>
                 </a:solidFill>
               </a:rPr>
-              <a:t>②武士に対しての</a:t>
-            </a:r>
-            <a:endParaRPr lang="en-US" sz="1150" dirty="0"/>
+              <a:t>②武士に</a:t>
+            </a:r>
+            <a:endParaRPr lang="en-US" sz="1050" dirty="0"/>
           </a:p>
           <a:p>
             <a:pPr algn="ctr" indent="0" marL="0">
               <a:spcAft>
-                <a:spcPts val="200"/>
+                <a:spcPts val="100"/>
               </a:spcAft>
               <a:buNone/>
             </a:pPr>
             <a:r>
-              <a:rPr lang="en-US" sz="1150" dirty="0">
+              <a:rPr lang="en-US" sz="1050" dirty="0">
                 <a:solidFill>
                   <a:srgbClr val="222222"/>
                 </a:solidFill>
               </a:rPr>
-              <a:t>取り組みや考え</a:t>
-            </a:r>
-            <a:endParaRPr lang="en-US" sz="1150" dirty="0"/>
+              <a:t>対しての</a:t>
+            </a:r>
+            <a:endParaRPr lang="en-US" sz="1050" dirty="0"/>
           </a:p>
           <a:p>
             <a:pPr algn="ctr" indent="0" marL="0">
               <a:spcAft>
-                <a:spcPts val="200"/>
+                <a:spcPts val="100"/>
               </a:spcAft>
               <a:buNone/>
             </a:pPr>
             <a:r>
-              <a:rPr lang="en-US" sz="1150" b="1" dirty="0">
+              <a:rPr lang="en-US" sz="1050" dirty="0">
+                <a:solidFill>
+                  <a:srgbClr val="222222"/>
+                </a:solidFill>
+              </a:rPr>
+              <a:t>取り組みや</a:t>
+            </a:r>
+            <a:endParaRPr lang="en-US" sz="1050" dirty="0"/>
+          </a:p>
+          <a:p>
+            <a:pPr algn="ctr" indent="0" marL="0">
+              <a:spcAft>
+                <a:spcPts val="100"/>
+              </a:spcAft>
+              <a:buNone/>
+            </a:pPr>
+            <a:r>
+              <a:rPr lang="en-US" sz="1050" dirty="0">
+                <a:solidFill>
+                  <a:srgbClr val="222222"/>
+                </a:solidFill>
+              </a:rPr>
+              <a:t>考え</a:t>
+            </a:r>
+            <a:endParaRPr lang="en-US" sz="1050" dirty="0"/>
+          </a:p>
+          <a:p>
+            <a:pPr algn="ctr" indent="0" marL="0">
+              <a:spcAft>
+                <a:spcPts val="100"/>
+              </a:spcAft>
+              <a:buNone/>
+            </a:pPr>
+            <a:r>
+              <a:rPr lang="en-US" sz="1050" b="1" dirty="0">
                 <a:solidFill>
                   <a:srgbClr val="3E7D3E"/>
                 </a:solidFill>
               </a:rPr>
               <a:t>（軍事）</a:t>
             </a:r>
-            <a:endParaRPr lang="en-US" sz="1150" dirty="0"/>
+            <a:endParaRPr lang="en-US" sz="1050" dirty="0"/>
           </a:p>
         </p:txBody>
       </p:sp>
       <p:sp>
         <p:nvSpPr>
-          <p:cNvPr id="26" name="Shape 20"/>
+          <p:cNvPr id="19" name="Shape 13"/>
           <p:cNvSpPr/>
           <p:nvPr/>
         </p:nvSpPr>
         <p:spPr>
           <a:xfrm>
-            <a:off x="2020824" y="3419856"/>
-            <a:ext cx="3108960" cy="1865376"/>
+            <a:off x="1051560" y="3023616"/>
+            <a:ext cx="3561588" cy="2200656"/>
           </a:xfrm>
           <a:prstGeom prst="rect">
             <a:avLst/>
@@ -1788,14 +1619,14 @@
       </p:sp>
       <p:sp>
         <p:nvSpPr>
-          <p:cNvPr id="27" name="Shape 21"/>
+          <p:cNvPr id="20" name="Shape 14"/>
           <p:cNvSpPr/>
           <p:nvPr/>
         </p:nvSpPr>
         <p:spPr>
           <a:xfrm>
-            <a:off x="5184648" y="3419856"/>
-            <a:ext cx="2139696" cy="1865376"/>
+            <a:off x="4658868" y="3023616"/>
+            <a:ext cx="2286000" cy="2200656"/>
           </a:xfrm>
           <a:prstGeom prst="rect">
             <a:avLst/>
@@ -1813,14 +1644,14 @@
       </p:sp>
       <p:sp>
         <p:nvSpPr>
-          <p:cNvPr id="28" name="Shape 22"/>
+          <p:cNvPr id="21" name="Shape 15"/>
           <p:cNvSpPr/>
           <p:nvPr/>
         </p:nvSpPr>
         <p:spPr>
           <a:xfrm>
-            <a:off x="7379208" y="3419856"/>
-            <a:ext cx="2944368" cy="1865376"/>
+            <a:off x="6990588" y="3023616"/>
+            <a:ext cx="3561588" cy="2200656"/>
           </a:xfrm>
           <a:prstGeom prst="rect">
             <a:avLst/>
@@ -1838,113 +1669,18 @@
       </p:sp>
       <p:sp>
         <p:nvSpPr>
-          <p:cNvPr id="29" name="Text 23"/>
-          <p:cNvSpPr txBox="1"/>
-          <p:nvPr/>
-        </p:nvSpPr>
-        <p:spPr>
-          <a:xfrm>
-            <a:off x="5257800" y="3474720"/>
-            <a:ext cx="1993392" cy="219456"/>
-          </a:xfrm>
-          <a:prstGeom prst="rect">
-            <a:avLst/>
-          </a:prstGeom>
-          <a:noFill/>
-          <a:ln/>
-        </p:spPr>
-        <p:txBody>
-          <a:bodyPr wrap="square" lIns="0" tIns="0" rIns="0" bIns="0" rtlCol="0" anchor="ctr"/>
-          <a:lstStyle/>
-          <a:p>
-            <a:pPr indent="0" marL="0">
-              <a:buNone/>
-            </a:pPr>
-            <a:r>
-              <a:rPr lang="en-US" sz="1000" dirty="0">
-                <a:solidFill>
-                  <a:srgbClr val="9A8A55"/>
-                </a:solidFill>
-              </a:rPr>
-              <a:t>同じところ</a:t>
-            </a:r>
-            <a:endParaRPr lang="en-US" sz="1000" dirty="0"/>
-          </a:p>
-        </p:txBody>
-      </p:sp>
-      <p:sp>
-        <p:nvSpPr>
-          <p:cNvPr id="30" name="Shape 24"/>
+          <p:cNvPr id="22" name="Shape 16"/>
           <p:cNvSpPr/>
           <p:nvPr/>
         </p:nvSpPr>
         <p:spPr>
           <a:xfrm>
-            <a:off x="5257800" y="4352544"/>
-            <a:ext cx="1993392" cy="0"/>
-          </a:xfrm>
-          <a:prstGeom prst="line">
-            <a:avLst/>
-          </a:prstGeom>
-          <a:noFill/>
-          <a:ln w="9525">
-            <a:solidFill>
-              <a:srgbClr val="D9CC99"/>
-            </a:solidFill>
-            <a:prstDash val="dash"/>
-          </a:ln>
-        </p:spPr>
-      </p:sp>
-      <p:sp>
-        <p:nvSpPr>
-          <p:cNvPr id="31" name="Text 25"/>
-          <p:cNvSpPr txBox="1"/>
-          <p:nvPr/>
-        </p:nvSpPr>
-        <p:spPr>
-          <a:xfrm>
-            <a:off x="5257800" y="4407408"/>
-            <a:ext cx="1993392" cy="219456"/>
-          </a:xfrm>
-          <a:prstGeom prst="rect">
-            <a:avLst/>
-          </a:prstGeom>
-          <a:noFill/>
-          <a:ln/>
-        </p:spPr>
-        <p:txBody>
-          <a:bodyPr wrap="square" lIns="0" tIns="0" rIns="0" bIns="0" rtlCol="0" anchor="ctr"/>
-          <a:lstStyle/>
-          <a:p>
-            <a:pPr indent="0" marL="0">
-              <a:buNone/>
-            </a:pPr>
-            <a:r>
-              <a:rPr lang="en-US" sz="1000" dirty="0">
-                <a:solidFill>
-                  <a:srgbClr val="9A8A55"/>
-                </a:solidFill>
-              </a:rPr>
-              <a:t>ちがうところ</a:t>
-            </a:r>
-            <a:endParaRPr lang="en-US" sz="1000" dirty="0"/>
-          </a:p>
-        </p:txBody>
-      </p:sp>
-      <p:sp>
-        <p:nvSpPr>
-          <p:cNvPr id="32" name="Shape 26"/>
-          <p:cNvSpPr/>
-          <p:nvPr/>
-        </p:nvSpPr>
-        <p:spPr>
-          <a:xfrm>
-            <a:off x="365760" y="5376672"/>
-            <a:ext cx="1600200" cy="1865376"/>
+            <a:off x="137160" y="5315712"/>
+            <a:ext cx="868680" cy="2200656"/>
           </a:xfrm>
           <a:prstGeom prst="roundRect">
             <a:avLst>
-              <a:gd name="adj" fmla="val 4571"/>
+              <a:gd name="adj" fmla="val 8421"/>
             </a:avLst>
           </a:prstGeom>
           <a:solidFill>
@@ -1960,7 +1696,7 @@
       </p:sp>
       <p:pic>
         <p:nvPicPr>
-          <p:cNvPr id="33" name="Image 4" descr="preencoded.png">    </p:cNvPr>
+          <p:cNvPr id="23" name="Image 4" descr="preencoded.png">    </p:cNvPr>
           <p:cNvPicPr>
             <a:picLocks noChangeAspect="1"/>
           </p:cNvPicPr>
@@ -1974,8 +1710,8 @@
         </p:blipFill>
         <p:spPr>
           <a:xfrm>
-            <a:off x="891540" y="5541264"/>
-            <a:ext cx="548640" cy="548640"/>
+            <a:off x="342900" y="5452872"/>
+            <a:ext cx="457200" cy="457200"/>
           </a:xfrm>
           <a:prstGeom prst="rect">
             <a:avLst/>
@@ -1984,14 +1720,14 @@
       </p:pic>
       <p:sp>
         <p:nvSpPr>
-          <p:cNvPr id="34" name="Text 27"/>
+          <p:cNvPr id="24" name="Text 17"/>
           <p:cNvSpPr txBox="1"/>
           <p:nvPr/>
         </p:nvSpPr>
         <p:spPr>
           <a:xfrm>
-            <a:off x="402336" y="6153912"/>
-            <a:ext cx="1527048" cy="996696"/>
+            <a:off x="164592" y="5974080"/>
+            <a:ext cx="813816" cy="1469136"/>
           </a:xfrm>
           <a:prstGeom prst="rect">
             <a:avLst/>
@@ -2005,66 +1741,100 @@
           <a:p>
             <a:pPr algn="ctr" indent="0" marL="0">
               <a:spcAft>
-                <a:spcPts val="200"/>
+                <a:spcPts val="100"/>
               </a:spcAft>
               <a:buNone/>
             </a:pPr>
             <a:r>
-              <a:rPr lang="en-US" sz="1150" dirty="0">
+              <a:rPr lang="en-US" sz="1050" dirty="0">
                 <a:solidFill>
                   <a:srgbClr val="222222"/>
                 </a:solidFill>
               </a:rPr>
-              <a:t>③農民に対しての</a:t>
-            </a:r>
-            <a:endParaRPr lang="en-US" sz="1150" dirty="0"/>
+              <a:t>③農民に</a:t>
+            </a:r>
+            <a:endParaRPr lang="en-US" sz="1050" dirty="0"/>
           </a:p>
           <a:p>
             <a:pPr algn="ctr" indent="0" marL="0">
               <a:spcAft>
-                <a:spcPts val="200"/>
+                <a:spcPts val="100"/>
               </a:spcAft>
               <a:buNone/>
             </a:pPr>
             <a:r>
-              <a:rPr lang="en-US" sz="1150" dirty="0">
+              <a:rPr lang="en-US" sz="1050" dirty="0">
                 <a:solidFill>
                   <a:srgbClr val="222222"/>
                 </a:solidFill>
               </a:rPr>
-              <a:t>取り組みや考え</a:t>
-            </a:r>
-            <a:endParaRPr lang="en-US" sz="1150" dirty="0"/>
+              <a:t>対しての</a:t>
+            </a:r>
+            <a:endParaRPr lang="en-US" sz="1050" dirty="0"/>
           </a:p>
           <a:p>
             <a:pPr algn="ctr" indent="0" marL="0">
               <a:spcAft>
-                <a:spcPts val="200"/>
+                <a:spcPts val="100"/>
               </a:spcAft>
               <a:buNone/>
             </a:pPr>
             <a:r>
-              <a:rPr lang="en-US" sz="1150" b="1" dirty="0">
+              <a:rPr lang="en-US" sz="1050" dirty="0">
+                <a:solidFill>
+                  <a:srgbClr val="222222"/>
+                </a:solidFill>
+              </a:rPr>
+              <a:t>取り組みや</a:t>
+            </a:r>
+            <a:endParaRPr lang="en-US" sz="1050" dirty="0"/>
+          </a:p>
+          <a:p>
+            <a:pPr algn="ctr" indent="0" marL="0">
+              <a:spcAft>
+                <a:spcPts val="100"/>
+              </a:spcAft>
+              <a:buNone/>
+            </a:pPr>
+            <a:r>
+              <a:rPr lang="en-US" sz="1050" dirty="0">
+                <a:solidFill>
+                  <a:srgbClr val="222222"/>
+                </a:solidFill>
+              </a:rPr>
+              <a:t>考え</a:t>
+            </a:r>
+            <a:endParaRPr lang="en-US" sz="1050" dirty="0"/>
+          </a:p>
+          <a:p>
+            <a:pPr algn="ctr" indent="0" marL="0">
+              <a:spcAft>
+                <a:spcPts val="100"/>
+              </a:spcAft>
+              <a:buNone/>
+            </a:pPr>
+            <a:r>
+              <a:rPr lang="en-US" sz="1050" b="1" dirty="0">
                 <a:solidFill>
                   <a:srgbClr val="C8641E"/>
                 </a:solidFill>
               </a:rPr>
               <a:t>（民事）</a:t>
             </a:r>
-            <a:endParaRPr lang="en-US" sz="1150" dirty="0"/>
+            <a:endParaRPr lang="en-US" sz="1050" dirty="0"/>
           </a:p>
         </p:txBody>
       </p:sp>
       <p:sp>
         <p:nvSpPr>
-          <p:cNvPr id="35" name="Shape 28"/>
+          <p:cNvPr id="25" name="Shape 18"/>
           <p:cNvSpPr/>
           <p:nvPr/>
         </p:nvSpPr>
         <p:spPr>
           <a:xfrm>
-            <a:off x="2020824" y="5376672"/>
-            <a:ext cx="3108960" cy="1865376"/>
+            <a:off x="1051560" y="5315712"/>
+            <a:ext cx="3561588" cy="2200656"/>
           </a:xfrm>
           <a:prstGeom prst="rect">
             <a:avLst/>
@@ -2082,14 +1852,14 @@
       </p:sp>
       <p:sp>
         <p:nvSpPr>
-          <p:cNvPr id="36" name="Shape 29"/>
+          <p:cNvPr id="26" name="Shape 19"/>
           <p:cNvSpPr/>
           <p:nvPr/>
         </p:nvSpPr>
         <p:spPr>
           <a:xfrm>
-            <a:off x="5184648" y="5376672"/>
-            <a:ext cx="2139696" cy="1865376"/>
+            <a:off x="4658868" y="5315712"/>
+            <a:ext cx="2286000" cy="2200656"/>
           </a:xfrm>
           <a:prstGeom prst="rect">
             <a:avLst/>
@@ -2107,14 +1877,14 @@
       </p:sp>
       <p:sp>
         <p:nvSpPr>
-          <p:cNvPr id="37" name="Shape 30"/>
+          <p:cNvPr id="27" name="Shape 20"/>
           <p:cNvSpPr/>
           <p:nvPr/>
         </p:nvSpPr>
         <p:spPr>
           <a:xfrm>
-            <a:off x="7379208" y="5376672"/>
-            <a:ext cx="2944368" cy="1865376"/>
+            <a:off x="6990588" y="5315712"/>
+            <a:ext cx="3561588" cy="2200656"/>
           </a:xfrm>
           <a:prstGeom prst="rect">
             <a:avLst/>
@@ -2129,101 +1899,6 @@
             <a:prstDash val="solid"/>
           </a:ln>
         </p:spPr>
-      </p:sp>
-      <p:sp>
-        <p:nvSpPr>
-          <p:cNvPr id="38" name="Text 31"/>
-          <p:cNvSpPr txBox="1"/>
-          <p:nvPr/>
-        </p:nvSpPr>
-        <p:spPr>
-          <a:xfrm>
-            <a:off x="5257800" y="5431536"/>
-            <a:ext cx="1993392" cy="219456"/>
-          </a:xfrm>
-          <a:prstGeom prst="rect">
-            <a:avLst/>
-          </a:prstGeom>
-          <a:noFill/>
-          <a:ln/>
-        </p:spPr>
-        <p:txBody>
-          <a:bodyPr wrap="square" lIns="0" tIns="0" rIns="0" bIns="0" rtlCol="0" anchor="ctr"/>
-          <a:lstStyle/>
-          <a:p>
-            <a:pPr indent="0" marL="0">
-              <a:buNone/>
-            </a:pPr>
-            <a:r>
-              <a:rPr lang="en-US" sz="1000" dirty="0">
-                <a:solidFill>
-                  <a:srgbClr val="9A8A55"/>
-                </a:solidFill>
-              </a:rPr>
-              <a:t>同じところ</a:t>
-            </a:r>
-            <a:endParaRPr lang="en-US" sz="1000" dirty="0"/>
-          </a:p>
-        </p:txBody>
-      </p:sp>
-      <p:sp>
-        <p:nvSpPr>
-          <p:cNvPr id="39" name="Shape 32"/>
-          <p:cNvSpPr/>
-          <p:nvPr/>
-        </p:nvSpPr>
-        <p:spPr>
-          <a:xfrm>
-            <a:off x="5257800" y="6309360"/>
-            <a:ext cx="1993392" cy="0"/>
-          </a:xfrm>
-          <a:prstGeom prst="line">
-            <a:avLst/>
-          </a:prstGeom>
-          <a:noFill/>
-          <a:ln w="9525">
-            <a:solidFill>
-              <a:srgbClr val="D9CC99"/>
-            </a:solidFill>
-            <a:prstDash val="dash"/>
-          </a:ln>
-        </p:spPr>
-      </p:sp>
-      <p:sp>
-        <p:nvSpPr>
-          <p:cNvPr id="40" name="Text 33"/>
-          <p:cNvSpPr txBox="1"/>
-          <p:nvPr/>
-        </p:nvSpPr>
-        <p:spPr>
-          <a:xfrm>
-            <a:off x="5257800" y="6364224"/>
-            <a:ext cx="1993392" cy="219456"/>
-          </a:xfrm>
-          <a:prstGeom prst="rect">
-            <a:avLst/>
-          </a:prstGeom>
-          <a:noFill/>
-          <a:ln/>
-        </p:spPr>
-        <p:txBody>
-          <a:bodyPr wrap="square" lIns="0" tIns="0" rIns="0" bIns="0" rtlCol="0" anchor="ctr"/>
-          <a:lstStyle/>
-          <a:p>
-            <a:pPr indent="0" marL="0">
-              <a:buNone/>
-            </a:pPr>
-            <a:r>
-              <a:rPr lang="en-US" sz="1000" dirty="0">
-                <a:solidFill>
-                  <a:srgbClr val="9A8A55"/>
-                </a:solidFill>
-              </a:rPr>
-              <a:t>ちがうところ</a:t>
-            </a:r>
-            <a:endParaRPr lang="en-US" sz="1000" dirty="0"/>
-          </a:p>
-        </p:txBody>
       </p:sp>
     </p:spTree>
   </p:cSld>
@@ -2259,124 +1934,18 @@
       </p:grpSpPr>
       <p:sp>
         <p:nvSpPr>
-          <p:cNvPr id="2" name="Text 0"/>
-          <p:cNvSpPr txBox="1"/>
-          <p:nvPr/>
-        </p:nvSpPr>
-        <p:spPr>
-          <a:xfrm>
-            <a:off x="365760" y="201168"/>
-            <a:ext cx="5943600" cy="384048"/>
-          </a:xfrm>
-          <a:prstGeom prst="rect">
-            <a:avLst/>
-          </a:prstGeom>
-          <a:noFill/>
-          <a:ln/>
-        </p:spPr>
-        <p:txBody>
-          <a:bodyPr wrap="square" lIns="0" tIns="0" rIns="0" bIns="0" rtlCol="0" anchor="ctr"/>
-          <a:lstStyle/>
-          <a:p>
-            <a:pPr indent="0" marL="0">
-              <a:buNone/>
-            </a:pPr>
-            <a:r>
-              <a:rPr lang="en-US" sz="1600" b="1" dirty="0">
-                <a:solidFill>
-                  <a:srgbClr val="333333"/>
-                </a:solidFill>
-              </a:rPr>
-              <a:t>戦国の世から天下統一へ　</a:t>
-            </a:r>
-            <a:pPr indent="0" marL="0">
-              <a:buNone/>
-            </a:pPr>
-            <a:r>
-              <a:rPr lang="en-US" sz="1300" dirty="0">
-                <a:solidFill>
-                  <a:srgbClr val="333333"/>
-                </a:solidFill>
-              </a:rPr>
-              <a:t>分析ワークシート（2／2）</a:t>
-            </a:r>
-            <a:endParaRPr lang="en-US" sz="1600" dirty="0"/>
-          </a:p>
-        </p:txBody>
-      </p:sp>
-      <p:sp>
-        <p:nvSpPr>
-          <p:cNvPr id="3" name="Text 1"/>
-          <p:cNvSpPr txBox="1"/>
-          <p:nvPr/>
-        </p:nvSpPr>
-        <p:spPr>
-          <a:xfrm>
-            <a:off x="6309360" y="201168"/>
-            <a:ext cx="4014216" cy="384048"/>
-          </a:xfrm>
-          <a:prstGeom prst="rect">
-            <a:avLst/>
-          </a:prstGeom>
-          <a:noFill/>
-          <a:ln/>
-        </p:spPr>
-        <p:txBody>
-          <a:bodyPr wrap="square" lIns="0" tIns="0" rIns="0" bIns="0" rtlCol="0" anchor="ctr"/>
-          <a:lstStyle/>
-          <a:p>
-            <a:pPr indent="0" marL="0">
-              <a:buNone/>
-            </a:pPr>
-            <a:r>
-              <a:rPr lang="en-US" sz="1300" dirty="0">
-                <a:solidFill>
-                  <a:srgbClr val="333333"/>
-                </a:solidFill>
-              </a:rPr>
-              <a:t>6年　　組　　番　名前</a:t>
-            </a:r>
-            <a:endParaRPr lang="en-US" sz="1300" dirty="0"/>
-          </a:p>
-        </p:txBody>
-      </p:sp>
-      <p:sp>
-        <p:nvSpPr>
-          <p:cNvPr id="4" name="Shape 2"/>
+          <p:cNvPr id="2" name="Shape 0"/>
           <p:cNvSpPr/>
           <p:nvPr/>
         </p:nvSpPr>
         <p:spPr>
           <a:xfrm>
-            <a:off x="8001000" y="548640"/>
-            <a:ext cx="2322576" cy="0"/>
-          </a:xfrm>
-          <a:prstGeom prst="line">
-            <a:avLst/>
-          </a:prstGeom>
-          <a:noFill/>
-          <a:ln w="9525">
-            <a:solidFill>
-              <a:srgbClr val="666666"/>
-            </a:solidFill>
-            <a:prstDash val="solid"/>
-          </a:ln>
-        </p:spPr>
-      </p:sp>
-      <p:sp>
-        <p:nvSpPr>
-          <p:cNvPr id="5" name="Shape 3"/>
-          <p:cNvSpPr/>
-          <p:nvPr/>
-        </p:nvSpPr>
-        <p:spPr>
-          <a:xfrm>
-            <a:off x="2020824" y="713232"/>
-            <a:ext cx="3108960" cy="658368"/>
+            <a:off x="1051560" y="137160"/>
+            <a:ext cx="3561588" cy="548640"/>
           </a:xfrm>
           <a:prstGeom prst="roundRect">
             <a:avLst>
-              <a:gd name="adj" fmla="val 11111"/>
+              <a:gd name="adj" fmla="val 13333"/>
             </a:avLst>
           </a:prstGeom>
           <a:solidFill>
@@ -2392,7 +1961,7 @@
       </p:sp>
       <p:pic>
         <p:nvPicPr>
-          <p:cNvPr id="6" name="Image 0" descr="preencoded.png">    </p:cNvPr>
+          <p:cNvPr id="3" name="Image 0" descr="preencoded.png">    </p:cNvPr>
           <p:cNvPicPr>
             <a:picLocks noChangeAspect="1"/>
           </p:cNvPicPr>
@@ -2406,8 +1975,8 @@
         </p:blipFill>
         <p:spPr>
           <a:xfrm>
-            <a:off x="2295144" y="786384"/>
-            <a:ext cx="512064" cy="512064"/>
+            <a:off x="1280160" y="192024"/>
+            <a:ext cx="438912" cy="438912"/>
           </a:xfrm>
           <a:prstGeom prst="rect">
             <a:avLst/>
@@ -2416,14 +1985,14 @@
       </p:pic>
       <p:sp>
         <p:nvSpPr>
-          <p:cNvPr id="7" name="Text 4"/>
+          <p:cNvPr id="4" name="Text 1"/>
           <p:cNvSpPr txBox="1"/>
           <p:nvPr/>
         </p:nvSpPr>
         <p:spPr>
           <a:xfrm>
-            <a:off x="2889504" y="713232"/>
-            <a:ext cx="2103120" cy="658368"/>
+            <a:off x="1828800" y="137160"/>
+            <a:ext cx="2555748" cy="548640"/>
           </a:xfrm>
           <a:prstGeom prst="rect">
             <a:avLst/>
@@ -2452,18 +2021,18 @@
       </p:sp>
       <p:sp>
         <p:nvSpPr>
-          <p:cNvPr id="8" name="Shape 5"/>
+          <p:cNvPr id="5" name="Shape 2"/>
           <p:cNvSpPr/>
           <p:nvPr/>
         </p:nvSpPr>
         <p:spPr>
           <a:xfrm>
-            <a:off x="5184648" y="713232"/>
-            <a:ext cx="2139696" cy="658368"/>
+            <a:off x="4658868" y="137160"/>
+            <a:ext cx="2286000" cy="548640"/>
           </a:xfrm>
           <a:prstGeom prst="roundRect">
             <a:avLst>
-              <a:gd name="adj" fmla="val 11111"/>
+              <a:gd name="adj" fmla="val 13333"/>
             </a:avLst>
           </a:prstGeom>
           <a:solidFill>
@@ -2479,14 +2048,14 @@
       </p:sp>
       <p:sp>
         <p:nvSpPr>
-          <p:cNvPr id="9" name="Text 6"/>
+          <p:cNvPr id="6" name="Text 3"/>
           <p:cNvSpPr txBox="1"/>
           <p:nvPr/>
         </p:nvSpPr>
         <p:spPr>
           <a:xfrm>
-            <a:off x="5184648" y="749808"/>
-            <a:ext cx="2139696" cy="384048"/>
+            <a:off x="4658868" y="137160"/>
+            <a:ext cx="2286000" cy="548640"/>
           </a:xfrm>
           <a:prstGeom prst="rect">
             <a:avLst/>
@@ -2515,54 +2084,18 @@
       </p:sp>
       <p:sp>
         <p:nvSpPr>
-          <p:cNvPr id="10" name="Text 7"/>
-          <p:cNvSpPr txBox="1"/>
-          <p:nvPr/>
-        </p:nvSpPr>
-        <p:spPr>
-          <a:xfrm>
-            <a:off x="5184648" y="1097280"/>
-            <a:ext cx="2139696" cy="237744"/>
-          </a:xfrm>
-          <a:prstGeom prst="rect">
-            <a:avLst/>
-          </a:prstGeom>
-          <a:noFill/>
-          <a:ln/>
-        </p:spPr>
-        <p:txBody>
-          <a:bodyPr wrap="square" lIns="0" tIns="0" rIns="0" bIns="0" rtlCol="0" anchor="ctr"/>
-          <a:lstStyle/>
-          <a:p>
-            <a:pPr algn="ctr" indent="0" marL="0">
-              <a:buNone/>
-            </a:pPr>
-            <a:r>
-              <a:rPr lang="en-US" sz="1100" dirty="0">
-                <a:solidFill>
-                  <a:srgbClr val="7A5A00"/>
-                </a:solidFill>
-              </a:rPr>
-              <a:t>同じところ・ちがうところ</a:t>
-            </a:r>
-            <a:endParaRPr lang="en-US" sz="1100" dirty="0"/>
-          </a:p>
-        </p:txBody>
-      </p:sp>
-      <p:sp>
-        <p:nvSpPr>
-          <p:cNvPr id="11" name="Shape 8"/>
+          <p:cNvPr id="7" name="Shape 4"/>
           <p:cNvSpPr/>
           <p:nvPr/>
         </p:nvSpPr>
         <p:spPr>
           <a:xfrm>
-            <a:off x="7379208" y="713232"/>
-            <a:ext cx="2944368" cy="658368"/>
+            <a:off x="6990588" y="137160"/>
+            <a:ext cx="3561588" cy="548640"/>
           </a:xfrm>
           <a:prstGeom prst="roundRect">
             <a:avLst>
-              <a:gd name="adj" fmla="val 11111"/>
+              <a:gd name="adj" fmla="val 13333"/>
             </a:avLst>
           </a:prstGeom>
           <a:solidFill>
@@ -2578,7 +2111,7 @@
       </p:sp>
       <p:pic>
         <p:nvPicPr>
-          <p:cNvPr id="12" name="Image 1" descr="preencoded.png">    </p:cNvPr>
+          <p:cNvPr id="8" name="Image 1" descr="preencoded.png">    </p:cNvPr>
           <p:cNvPicPr>
             <a:picLocks noChangeAspect="1"/>
           </p:cNvPicPr>
@@ -2592,8 +2125,8 @@
         </p:blipFill>
         <p:spPr>
           <a:xfrm>
-            <a:off x="7653528" y="786384"/>
-            <a:ext cx="512064" cy="512064"/>
+            <a:off x="7219188" y="192024"/>
+            <a:ext cx="438912" cy="438912"/>
           </a:xfrm>
           <a:prstGeom prst="rect">
             <a:avLst/>
@@ -2602,14 +2135,14 @@
       </p:pic>
       <p:sp>
         <p:nvSpPr>
-          <p:cNvPr id="13" name="Text 9"/>
+          <p:cNvPr id="9" name="Text 5"/>
           <p:cNvSpPr txBox="1"/>
           <p:nvPr/>
         </p:nvSpPr>
         <p:spPr>
           <a:xfrm>
-            <a:off x="8247888" y="713232"/>
-            <a:ext cx="1938528" cy="658368"/>
+            <a:off x="7767828" y="137160"/>
+            <a:ext cx="2555748" cy="548640"/>
           </a:xfrm>
           <a:prstGeom prst="rect">
             <a:avLst/>
@@ -2638,18 +2171,18 @@
       </p:sp>
       <p:sp>
         <p:nvSpPr>
-          <p:cNvPr id="14" name="Shape 10"/>
+          <p:cNvPr id="10" name="Shape 6"/>
           <p:cNvSpPr/>
           <p:nvPr/>
         </p:nvSpPr>
         <p:spPr>
           <a:xfrm>
-            <a:off x="365760" y="1463040"/>
-            <a:ext cx="1600200" cy="1865376"/>
+            <a:off x="137160" y="731520"/>
+            <a:ext cx="868680" cy="2200656"/>
           </a:xfrm>
           <a:prstGeom prst="roundRect">
             <a:avLst>
-              <a:gd name="adj" fmla="val 4571"/>
+              <a:gd name="adj" fmla="val 8421"/>
             </a:avLst>
           </a:prstGeom>
           <a:solidFill>
@@ -2665,7 +2198,7 @@
       </p:sp>
       <p:pic>
         <p:nvPicPr>
-          <p:cNvPr id="15" name="Image 2" descr="preencoded.png">    </p:cNvPr>
+          <p:cNvPr id="11" name="Image 2" descr="preencoded.png">    </p:cNvPr>
           <p:cNvPicPr>
             <a:picLocks noChangeAspect="1"/>
           </p:cNvPicPr>
@@ -2679,8 +2212,8 @@
         </p:blipFill>
         <p:spPr>
           <a:xfrm>
-            <a:off x="891540" y="1627632"/>
-            <a:ext cx="548640" cy="548640"/>
+            <a:off x="342900" y="868680"/>
+            <a:ext cx="457200" cy="457200"/>
           </a:xfrm>
           <a:prstGeom prst="rect">
             <a:avLst/>
@@ -2689,14 +2222,14 @@
       </p:pic>
       <p:sp>
         <p:nvSpPr>
-          <p:cNvPr id="16" name="Text 11"/>
+          <p:cNvPr id="12" name="Text 7"/>
           <p:cNvSpPr txBox="1"/>
           <p:nvPr/>
         </p:nvSpPr>
         <p:spPr>
           <a:xfrm>
-            <a:off x="402336" y="2240280"/>
-            <a:ext cx="1527048" cy="996696"/>
+            <a:off x="164592" y="1389888"/>
+            <a:ext cx="813816" cy="1469136"/>
           </a:xfrm>
           <a:prstGeom prst="rect">
             <a:avLst/>
@@ -2710,66 +2243,100 @@
           <a:p>
             <a:pPr algn="ctr" indent="0" marL="0">
               <a:spcAft>
-                <a:spcPts val="200"/>
+                <a:spcPts val="100"/>
               </a:spcAft>
               <a:buNone/>
             </a:pPr>
             <a:r>
-              <a:rPr lang="en-US" sz="1150" dirty="0">
+              <a:rPr lang="en-US" sz="1050" dirty="0">
                 <a:solidFill>
                   <a:srgbClr val="222222"/>
                 </a:solidFill>
               </a:rPr>
-              <a:t>④商人に対しての</a:t>
-            </a:r>
-            <a:endParaRPr lang="en-US" sz="1150" dirty="0"/>
+              <a:t>④商人に</a:t>
+            </a:r>
+            <a:endParaRPr lang="en-US" sz="1050" dirty="0"/>
           </a:p>
           <a:p>
             <a:pPr algn="ctr" indent="0" marL="0">
               <a:spcAft>
-                <a:spcPts val="200"/>
+                <a:spcPts val="100"/>
               </a:spcAft>
               <a:buNone/>
             </a:pPr>
             <a:r>
-              <a:rPr lang="en-US" sz="1150" dirty="0">
+              <a:rPr lang="en-US" sz="1050" dirty="0">
                 <a:solidFill>
                   <a:srgbClr val="222222"/>
                 </a:solidFill>
               </a:rPr>
-              <a:t>取り組みや考え</a:t>
-            </a:r>
-            <a:endParaRPr lang="en-US" sz="1150" dirty="0"/>
+              <a:t>対しての</a:t>
+            </a:r>
+            <a:endParaRPr lang="en-US" sz="1050" dirty="0"/>
           </a:p>
           <a:p>
             <a:pPr algn="ctr" indent="0" marL="0">
               <a:spcAft>
-                <a:spcPts val="200"/>
+                <a:spcPts val="100"/>
               </a:spcAft>
               <a:buNone/>
             </a:pPr>
             <a:r>
-              <a:rPr lang="en-US" sz="1150" b="1" dirty="0">
+              <a:rPr lang="en-US" sz="1050" dirty="0">
+                <a:solidFill>
+                  <a:srgbClr val="222222"/>
+                </a:solidFill>
+              </a:rPr>
+              <a:t>取り組みや</a:t>
+            </a:r>
+            <a:endParaRPr lang="en-US" sz="1050" dirty="0"/>
+          </a:p>
+          <a:p>
+            <a:pPr algn="ctr" indent="0" marL="0">
+              <a:spcAft>
+                <a:spcPts val="100"/>
+              </a:spcAft>
+              <a:buNone/>
+            </a:pPr>
+            <a:r>
+              <a:rPr lang="en-US" sz="1050" dirty="0">
+                <a:solidFill>
+                  <a:srgbClr val="222222"/>
+                </a:solidFill>
+              </a:rPr>
+              <a:t>考え</a:t>
+            </a:r>
+            <a:endParaRPr lang="en-US" sz="1050" dirty="0"/>
+          </a:p>
+          <a:p>
+            <a:pPr algn="ctr" indent="0" marL="0">
+              <a:spcAft>
+                <a:spcPts val="100"/>
+              </a:spcAft>
+              <a:buNone/>
+            </a:pPr>
+            <a:r>
+              <a:rPr lang="en-US" sz="1050" b="1" dirty="0">
                 <a:solidFill>
                   <a:srgbClr val="6E4FA0"/>
                 </a:solidFill>
               </a:rPr>
               <a:t>（経済）</a:t>
             </a:r>
-            <a:endParaRPr lang="en-US" sz="1150" dirty="0"/>
+            <a:endParaRPr lang="en-US" sz="1050" dirty="0"/>
           </a:p>
         </p:txBody>
       </p:sp>
       <p:sp>
         <p:nvSpPr>
-          <p:cNvPr id="17" name="Shape 12"/>
+          <p:cNvPr id="13" name="Shape 8"/>
           <p:cNvSpPr/>
           <p:nvPr/>
         </p:nvSpPr>
         <p:spPr>
           <a:xfrm>
-            <a:off x="2020824" y="1463040"/>
-            <a:ext cx="3108960" cy="1865376"/>
+            <a:off x="1051560" y="731520"/>
+            <a:ext cx="3561588" cy="2200656"/>
           </a:xfrm>
           <a:prstGeom prst="rect">
             <a:avLst/>
@@ -2787,14 +2354,14 @@
       </p:sp>
       <p:sp>
         <p:nvSpPr>
-          <p:cNvPr id="18" name="Shape 13"/>
+          <p:cNvPr id="14" name="Shape 9"/>
           <p:cNvSpPr/>
           <p:nvPr/>
         </p:nvSpPr>
         <p:spPr>
           <a:xfrm>
-            <a:off x="5184648" y="1463040"/>
-            <a:ext cx="2139696" cy="1865376"/>
+            <a:off x="4658868" y="731520"/>
+            <a:ext cx="2286000" cy="2200656"/>
           </a:xfrm>
           <a:prstGeom prst="rect">
             <a:avLst/>
@@ -2812,14 +2379,14 @@
       </p:sp>
       <p:sp>
         <p:nvSpPr>
-          <p:cNvPr id="19" name="Shape 14"/>
+          <p:cNvPr id="15" name="Shape 10"/>
           <p:cNvSpPr/>
           <p:nvPr/>
         </p:nvSpPr>
         <p:spPr>
           <a:xfrm>
-            <a:off x="7379208" y="1463040"/>
-            <a:ext cx="2944368" cy="1865376"/>
+            <a:off x="6990588" y="731520"/>
+            <a:ext cx="3561588" cy="2200656"/>
           </a:xfrm>
           <a:prstGeom prst="rect">
             <a:avLst/>
@@ -2837,113 +2404,18 @@
       </p:sp>
       <p:sp>
         <p:nvSpPr>
-          <p:cNvPr id="20" name="Text 15"/>
-          <p:cNvSpPr txBox="1"/>
-          <p:nvPr/>
-        </p:nvSpPr>
-        <p:spPr>
-          <a:xfrm>
-            <a:off x="5257800" y="1517904"/>
-            <a:ext cx="1993392" cy="219456"/>
-          </a:xfrm>
-          <a:prstGeom prst="rect">
-            <a:avLst/>
-          </a:prstGeom>
-          <a:noFill/>
-          <a:ln/>
-        </p:spPr>
-        <p:txBody>
-          <a:bodyPr wrap="square" lIns="0" tIns="0" rIns="0" bIns="0" rtlCol="0" anchor="ctr"/>
-          <a:lstStyle/>
-          <a:p>
-            <a:pPr indent="0" marL="0">
-              <a:buNone/>
-            </a:pPr>
-            <a:r>
-              <a:rPr lang="en-US" sz="1000" dirty="0">
-                <a:solidFill>
-                  <a:srgbClr val="9A8A55"/>
-                </a:solidFill>
-              </a:rPr>
-              <a:t>同じところ</a:t>
-            </a:r>
-            <a:endParaRPr lang="en-US" sz="1000" dirty="0"/>
-          </a:p>
-        </p:txBody>
-      </p:sp>
-      <p:sp>
-        <p:nvSpPr>
-          <p:cNvPr id="21" name="Shape 16"/>
+          <p:cNvPr id="16" name="Shape 11"/>
           <p:cNvSpPr/>
           <p:nvPr/>
         </p:nvSpPr>
         <p:spPr>
           <a:xfrm>
-            <a:off x="5257800" y="2395728"/>
-            <a:ext cx="1993392" cy="0"/>
-          </a:xfrm>
-          <a:prstGeom prst="line">
-            <a:avLst/>
-          </a:prstGeom>
-          <a:noFill/>
-          <a:ln w="9525">
-            <a:solidFill>
-              <a:srgbClr val="D9CC99"/>
-            </a:solidFill>
-            <a:prstDash val="dash"/>
-          </a:ln>
-        </p:spPr>
-      </p:sp>
-      <p:sp>
-        <p:nvSpPr>
-          <p:cNvPr id="22" name="Text 17"/>
-          <p:cNvSpPr txBox="1"/>
-          <p:nvPr/>
-        </p:nvSpPr>
-        <p:spPr>
-          <a:xfrm>
-            <a:off x="5257800" y="2450592"/>
-            <a:ext cx="1993392" cy="219456"/>
-          </a:xfrm>
-          <a:prstGeom prst="rect">
-            <a:avLst/>
-          </a:prstGeom>
-          <a:noFill/>
-          <a:ln/>
-        </p:spPr>
-        <p:txBody>
-          <a:bodyPr wrap="square" lIns="0" tIns="0" rIns="0" bIns="0" rtlCol="0" anchor="ctr"/>
-          <a:lstStyle/>
-          <a:p>
-            <a:pPr indent="0" marL="0">
-              <a:buNone/>
-            </a:pPr>
-            <a:r>
-              <a:rPr lang="en-US" sz="1000" dirty="0">
-                <a:solidFill>
-                  <a:srgbClr val="9A8A55"/>
-                </a:solidFill>
-              </a:rPr>
-              <a:t>ちがうところ</a:t>
-            </a:r>
-            <a:endParaRPr lang="en-US" sz="1000" dirty="0"/>
-          </a:p>
-        </p:txBody>
-      </p:sp>
-      <p:sp>
-        <p:nvSpPr>
-          <p:cNvPr id="23" name="Shape 18"/>
-          <p:cNvSpPr/>
-          <p:nvPr/>
-        </p:nvSpPr>
-        <p:spPr>
-          <a:xfrm>
-            <a:off x="365760" y="3419856"/>
-            <a:ext cx="1600200" cy="1865376"/>
+            <a:off x="137160" y="3023616"/>
+            <a:ext cx="868680" cy="2200656"/>
           </a:xfrm>
           <a:prstGeom prst="roundRect">
             <a:avLst>
-              <a:gd name="adj" fmla="val 4571"/>
+              <a:gd name="adj" fmla="val 8421"/>
             </a:avLst>
           </a:prstGeom>
           <a:solidFill>
@@ -2959,7 +2431,7 @@
       </p:sp>
       <p:pic>
         <p:nvPicPr>
-          <p:cNvPr id="24" name="Image 3" descr="preencoded.png">    </p:cNvPr>
+          <p:cNvPr id="17" name="Image 3" descr="preencoded.png">    </p:cNvPr>
           <p:cNvPicPr>
             <a:picLocks noChangeAspect="1"/>
           </p:cNvPicPr>
@@ -2973,8 +2445,8 @@
         </p:blipFill>
         <p:spPr>
           <a:xfrm>
-            <a:off x="891540" y="3584448"/>
-            <a:ext cx="548640" cy="548640"/>
+            <a:off x="342900" y="3160776"/>
+            <a:ext cx="457200" cy="457200"/>
           </a:xfrm>
           <a:prstGeom prst="rect">
             <a:avLst/>
@@ -2983,14 +2455,14 @@
       </p:pic>
       <p:sp>
         <p:nvSpPr>
-          <p:cNvPr id="25" name="Text 19"/>
+          <p:cNvPr id="18" name="Text 12"/>
           <p:cNvSpPr txBox="1"/>
           <p:nvPr/>
         </p:nvSpPr>
         <p:spPr>
           <a:xfrm>
-            <a:off x="402336" y="4197096"/>
-            <a:ext cx="1527048" cy="996696"/>
+            <a:off x="164592" y="3681984"/>
+            <a:ext cx="813816" cy="1469136"/>
           </a:xfrm>
           <a:prstGeom prst="rect">
             <a:avLst/>
@@ -3004,83 +2476,117 @@
           <a:p>
             <a:pPr algn="ctr" indent="0" marL="0">
               <a:spcAft>
-                <a:spcPts val="200"/>
+                <a:spcPts val="100"/>
               </a:spcAft>
               <a:buNone/>
             </a:pPr>
             <a:r>
-              <a:rPr lang="en-US" sz="1150" dirty="0">
+              <a:rPr lang="en-US" sz="1050" dirty="0">
                 <a:solidFill>
                   <a:srgbClr val="222222"/>
                 </a:solidFill>
               </a:rPr>
-              <a:t>⑤朝廷や幕府に</a:t>
-            </a:r>
-            <a:endParaRPr lang="en-US" sz="1150" dirty="0"/>
+              <a:t>⑤朝廷や</a:t>
+            </a:r>
+            <a:endParaRPr lang="en-US" sz="1050" dirty="0"/>
           </a:p>
           <a:p>
             <a:pPr algn="ctr" indent="0" marL="0">
               <a:spcAft>
-                <a:spcPts val="200"/>
+                <a:spcPts val="100"/>
               </a:spcAft>
               <a:buNone/>
             </a:pPr>
             <a:r>
-              <a:rPr lang="en-US" sz="1150" dirty="0">
+              <a:rPr lang="en-US" sz="1050" dirty="0">
                 <a:solidFill>
                   <a:srgbClr val="222222"/>
                 </a:solidFill>
               </a:rPr>
-              <a:t>対しての</a:t>
-            </a:r>
-            <a:endParaRPr lang="en-US" sz="1150" dirty="0"/>
+              <a:t>幕府に</a:t>
+            </a:r>
+            <a:endParaRPr lang="en-US" sz="1050" dirty="0"/>
           </a:p>
           <a:p>
             <a:pPr algn="ctr" indent="0" marL="0">
               <a:spcAft>
-                <a:spcPts val="200"/>
+                <a:spcPts val="100"/>
               </a:spcAft>
               <a:buNone/>
             </a:pPr>
             <a:r>
-              <a:rPr lang="en-US" sz="1150" dirty="0">
+              <a:rPr lang="en-US" sz="1050" dirty="0">
                 <a:solidFill>
                   <a:srgbClr val="222222"/>
                 </a:solidFill>
               </a:rPr>
-              <a:t>取り組みや考え</a:t>
-            </a:r>
-            <a:endParaRPr lang="en-US" sz="1150" dirty="0"/>
+              <a:t>対しての</a:t>
+            </a:r>
+            <a:endParaRPr lang="en-US" sz="1050" dirty="0"/>
           </a:p>
           <a:p>
             <a:pPr algn="ctr" indent="0" marL="0">
               <a:spcAft>
-                <a:spcPts val="200"/>
+                <a:spcPts val="100"/>
               </a:spcAft>
               <a:buNone/>
             </a:pPr>
             <a:r>
-              <a:rPr lang="en-US" sz="1150" b="1" dirty="0">
+              <a:rPr lang="en-US" sz="1050" dirty="0">
+                <a:solidFill>
+                  <a:srgbClr val="222222"/>
+                </a:solidFill>
+              </a:rPr>
+              <a:t>取り組みや</a:t>
+            </a:r>
+            <a:endParaRPr lang="en-US" sz="1050" dirty="0"/>
+          </a:p>
+          <a:p>
+            <a:pPr algn="ctr" indent="0" marL="0">
+              <a:spcAft>
+                <a:spcPts val="100"/>
+              </a:spcAft>
+              <a:buNone/>
+            </a:pPr>
+            <a:r>
+              <a:rPr lang="en-US" sz="1050" dirty="0">
+                <a:solidFill>
+                  <a:srgbClr val="222222"/>
+                </a:solidFill>
+              </a:rPr>
+              <a:t>考え</a:t>
+            </a:r>
+            <a:endParaRPr lang="en-US" sz="1050" dirty="0"/>
+          </a:p>
+          <a:p>
+            <a:pPr algn="ctr" indent="0" marL="0">
+              <a:spcAft>
+                <a:spcPts val="100"/>
+              </a:spcAft>
+              <a:buNone/>
+            </a:pPr>
+            <a:r>
+              <a:rPr lang="en-US" sz="1050" b="1" dirty="0">
                 <a:solidFill>
                   <a:srgbClr val="A0362E"/>
                 </a:solidFill>
               </a:rPr>
               <a:t>（政治）</a:t>
             </a:r>
-            <a:endParaRPr lang="en-US" sz="1150" dirty="0"/>
+            <a:endParaRPr lang="en-US" sz="1050" dirty="0"/>
           </a:p>
         </p:txBody>
       </p:sp>
       <p:sp>
         <p:nvSpPr>
-          <p:cNvPr id="26" name="Shape 20"/>
+          <p:cNvPr id="19" name="Shape 13"/>
           <p:cNvSpPr/>
           <p:nvPr/>
         </p:nvSpPr>
         <p:spPr>
           <a:xfrm>
-            <a:off x="2020824" y="3419856"/>
-            <a:ext cx="3108960" cy="1865376"/>
+            <a:off x="1051560" y="3023616"/>
+            <a:ext cx="3561588" cy="2200656"/>
           </a:xfrm>
           <a:prstGeom prst="rect">
             <a:avLst/>
@@ -3098,14 +2604,14 @@
       </p:sp>
       <p:sp>
         <p:nvSpPr>
-          <p:cNvPr id="27" name="Shape 21"/>
+          <p:cNvPr id="20" name="Shape 14"/>
           <p:cNvSpPr/>
           <p:nvPr/>
         </p:nvSpPr>
         <p:spPr>
           <a:xfrm>
-            <a:off x="5184648" y="3419856"/>
-            <a:ext cx="2139696" cy="1865376"/>
+            <a:off x="4658868" y="3023616"/>
+            <a:ext cx="2286000" cy="2200656"/>
           </a:xfrm>
           <a:prstGeom prst="rect">
             <a:avLst/>
@@ -3123,14 +2629,14 @@
       </p:sp>
       <p:sp>
         <p:nvSpPr>
-          <p:cNvPr id="28" name="Shape 22"/>
+          <p:cNvPr id="21" name="Shape 15"/>
           <p:cNvSpPr/>
           <p:nvPr/>
         </p:nvSpPr>
         <p:spPr>
           <a:xfrm>
-            <a:off x="7379208" y="3419856"/>
-            <a:ext cx="2944368" cy="1865376"/>
+            <a:off x="6990588" y="3023616"/>
+            <a:ext cx="3561588" cy="2200656"/>
           </a:xfrm>
           <a:prstGeom prst="rect">
             <a:avLst/>
@@ -3148,113 +2654,18 @@
       </p:sp>
       <p:sp>
         <p:nvSpPr>
-          <p:cNvPr id="29" name="Text 23"/>
-          <p:cNvSpPr txBox="1"/>
-          <p:nvPr/>
-        </p:nvSpPr>
-        <p:spPr>
-          <a:xfrm>
-            <a:off x="5257800" y="3474720"/>
-            <a:ext cx="1993392" cy="219456"/>
-          </a:xfrm>
-          <a:prstGeom prst="rect">
-            <a:avLst/>
-          </a:prstGeom>
-          <a:noFill/>
-          <a:ln/>
-        </p:spPr>
-        <p:txBody>
-          <a:bodyPr wrap="square" lIns="0" tIns="0" rIns="0" bIns="0" rtlCol="0" anchor="ctr"/>
-          <a:lstStyle/>
-          <a:p>
-            <a:pPr indent="0" marL="0">
-              <a:buNone/>
-            </a:pPr>
-            <a:r>
-              <a:rPr lang="en-US" sz="1000" dirty="0">
-                <a:solidFill>
-                  <a:srgbClr val="9A8A55"/>
-                </a:solidFill>
-              </a:rPr>
-              <a:t>同じところ</a:t>
-            </a:r>
-            <a:endParaRPr lang="en-US" sz="1000" dirty="0"/>
-          </a:p>
-        </p:txBody>
-      </p:sp>
-      <p:sp>
-        <p:nvSpPr>
-          <p:cNvPr id="30" name="Shape 24"/>
+          <p:cNvPr id="22" name="Shape 16"/>
           <p:cNvSpPr/>
           <p:nvPr/>
         </p:nvSpPr>
         <p:spPr>
           <a:xfrm>
-            <a:off x="5257800" y="4352544"/>
-            <a:ext cx="1993392" cy="0"/>
-          </a:xfrm>
-          <a:prstGeom prst="line">
-            <a:avLst/>
-          </a:prstGeom>
-          <a:noFill/>
-          <a:ln w="9525">
-            <a:solidFill>
-              <a:srgbClr val="D9CC99"/>
-            </a:solidFill>
-            <a:prstDash val="dash"/>
-          </a:ln>
-        </p:spPr>
-      </p:sp>
-      <p:sp>
-        <p:nvSpPr>
-          <p:cNvPr id="31" name="Text 25"/>
-          <p:cNvSpPr txBox="1"/>
-          <p:nvPr/>
-        </p:nvSpPr>
-        <p:spPr>
-          <a:xfrm>
-            <a:off x="5257800" y="4407408"/>
-            <a:ext cx="1993392" cy="219456"/>
-          </a:xfrm>
-          <a:prstGeom prst="rect">
-            <a:avLst/>
-          </a:prstGeom>
-          <a:noFill/>
-          <a:ln/>
-        </p:spPr>
-        <p:txBody>
-          <a:bodyPr wrap="square" lIns="0" tIns="0" rIns="0" bIns="0" rtlCol="0" anchor="ctr"/>
-          <a:lstStyle/>
-          <a:p>
-            <a:pPr indent="0" marL="0">
-              <a:buNone/>
-            </a:pPr>
-            <a:r>
-              <a:rPr lang="en-US" sz="1000" dirty="0">
-                <a:solidFill>
-                  <a:srgbClr val="9A8A55"/>
-                </a:solidFill>
-              </a:rPr>
-              <a:t>ちがうところ</a:t>
-            </a:r>
-            <a:endParaRPr lang="en-US" sz="1000" dirty="0"/>
-          </a:p>
-        </p:txBody>
-      </p:sp>
-      <p:sp>
-        <p:nvSpPr>
-          <p:cNvPr id="32" name="Shape 26"/>
-          <p:cNvSpPr/>
-          <p:nvPr/>
-        </p:nvSpPr>
-        <p:spPr>
-          <a:xfrm>
-            <a:off x="365760" y="5376672"/>
-            <a:ext cx="1600200" cy="1865376"/>
+            <a:off x="137160" y="5315712"/>
+            <a:ext cx="868680" cy="2200656"/>
           </a:xfrm>
           <a:prstGeom prst="roundRect">
             <a:avLst>
-              <a:gd name="adj" fmla="val 4571"/>
+              <a:gd name="adj" fmla="val 8421"/>
             </a:avLst>
           </a:prstGeom>
           <a:solidFill>
@@ -3270,7 +2681,7 @@
       </p:sp>
       <p:pic>
         <p:nvPicPr>
-          <p:cNvPr id="33" name="Image 4" descr="preencoded.png">    </p:cNvPr>
+          <p:cNvPr id="23" name="Image 4" descr="preencoded.png">    </p:cNvPr>
           <p:cNvPicPr>
             <a:picLocks noChangeAspect="1"/>
           </p:cNvPicPr>
@@ -3284,8 +2695,8 @@
         </p:blipFill>
         <p:spPr>
           <a:xfrm>
-            <a:off x="891540" y="5541264"/>
-            <a:ext cx="548640" cy="548640"/>
+            <a:off x="342900" y="5452872"/>
+            <a:ext cx="457200" cy="457200"/>
           </a:xfrm>
           <a:prstGeom prst="rect">
             <a:avLst/>
@@ -3294,14 +2705,14 @@
       </p:pic>
       <p:sp>
         <p:nvSpPr>
-          <p:cNvPr id="34" name="Text 27"/>
+          <p:cNvPr id="24" name="Text 17"/>
           <p:cNvSpPr txBox="1"/>
           <p:nvPr/>
         </p:nvSpPr>
         <p:spPr>
           <a:xfrm>
-            <a:off x="402336" y="6153912"/>
-            <a:ext cx="1527048" cy="996696"/>
+            <a:off x="164592" y="5974080"/>
+            <a:ext cx="813816" cy="1469136"/>
           </a:xfrm>
           <a:prstGeom prst="rect">
             <a:avLst/>
@@ -3315,32 +2726,32 @@
           <a:p>
             <a:pPr algn="ctr" indent="0" marL="0">
               <a:spcAft>
-                <a:spcPts val="200"/>
+                <a:spcPts val="100"/>
               </a:spcAft>
               <a:buNone/>
             </a:pPr>
             <a:r>
-              <a:rPr lang="en-US" sz="1600" b="1" dirty="0">
+              <a:rPr lang="en-US" sz="1300" b="1" dirty="0">
                 <a:solidFill>
                   <a:srgbClr val="222222"/>
                 </a:solidFill>
               </a:rPr>
               <a:t>⑥その他</a:t>
             </a:r>
-            <a:endParaRPr lang="en-US" sz="1600" dirty="0"/>
+            <a:endParaRPr lang="en-US" sz="1300" dirty="0"/>
           </a:p>
         </p:txBody>
       </p:sp>
       <p:sp>
         <p:nvSpPr>
-          <p:cNvPr id="35" name="Shape 28"/>
+          <p:cNvPr id="25" name="Shape 18"/>
           <p:cNvSpPr/>
           <p:nvPr/>
         </p:nvSpPr>
         <p:spPr>
           <a:xfrm>
-            <a:off x="2020824" y="5376672"/>
-            <a:ext cx="3108960" cy="1865376"/>
+            <a:off x="1051560" y="5315712"/>
+            <a:ext cx="3561588" cy="2200656"/>
           </a:xfrm>
           <a:prstGeom prst="rect">
             <a:avLst/>
@@ -3358,14 +2769,14 @@
       </p:sp>
       <p:sp>
         <p:nvSpPr>
-          <p:cNvPr id="36" name="Shape 29"/>
+          <p:cNvPr id="26" name="Shape 19"/>
           <p:cNvSpPr/>
           <p:nvPr/>
         </p:nvSpPr>
         <p:spPr>
           <a:xfrm>
-            <a:off x="5184648" y="5376672"/>
-            <a:ext cx="2139696" cy="1865376"/>
+            <a:off x="4658868" y="5315712"/>
+            <a:ext cx="2286000" cy="2200656"/>
           </a:xfrm>
           <a:prstGeom prst="rect">
             <a:avLst/>
@@ -3383,14 +2794,14 @@
       </p:sp>
       <p:sp>
         <p:nvSpPr>
-          <p:cNvPr id="37" name="Shape 30"/>
+          <p:cNvPr id="27" name="Shape 20"/>
           <p:cNvSpPr/>
           <p:nvPr/>
         </p:nvSpPr>
         <p:spPr>
           <a:xfrm>
-            <a:off x="7379208" y="5376672"/>
-            <a:ext cx="2944368" cy="1865376"/>
+            <a:off x="6990588" y="5315712"/>
+            <a:ext cx="3561588" cy="2200656"/>
           </a:xfrm>
           <a:prstGeom prst="rect">
             <a:avLst/>
@@ -3405,101 +2816,6 @@
             <a:prstDash val="solid"/>
           </a:ln>
         </p:spPr>
-      </p:sp>
-      <p:sp>
-        <p:nvSpPr>
-          <p:cNvPr id="38" name="Text 31"/>
-          <p:cNvSpPr txBox="1"/>
-          <p:nvPr/>
-        </p:nvSpPr>
-        <p:spPr>
-          <a:xfrm>
-            <a:off x="5257800" y="5431536"/>
-            <a:ext cx="1993392" cy="219456"/>
-          </a:xfrm>
-          <a:prstGeom prst="rect">
-            <a:avLst/>
-          </a:prstGeom>
-          <a:noFill/>
-          <a:ln/>
-        </p:spPr>
-        <p:txBody>
-          <a:bodyPr wrap="square" lIns="0" tIns="0" rIns="0" bIns="0" rtlCol="0" anchor="ctr"/>
-          <a:lstStyle/>
-          <a:p>
-            <a:pPr indent="0" marL="0">
-              <a:buNone/>
-            </a:pPr>
-            <a:r>
-              <a:rPr lang="en-US" sz="1000" dirty="0">
-                <a:solidFill>
-                  <a:srgbClr val="9A8A55"/>
-                </a:solidFill>
-              </a:rPr>
-              <a:t>同じところ</a:t>
-            </a:r>
-            <a:endParaRPr lang="en-US" sz="1000" dirty="0"/>
-          </a:p>
-        </p:txBody>
-      </p:sp>
-      <p:sp>
-        <p:nvSpPr>
-          <p:cNvPr id="39" name="Shape 32"/>
-          <p:cNvSpPr/>
-          <p:nvPr/>
-        </p:nvSpPr>
-        <p:spPr>
-          <a:xfrm>
-            <a:off x="5257800" y="6309360"/>
-            <a:ext cx="1993392" cy="0"/>
-          </a:xfrm>
-          <a:prstGeom prst="line">
-            <a:avLst/>
-          </a:prstGeom>
-          <a:noFill/>
-          <a:ln w="9525">
-            <a:solidFill>
-              <a:srgbClr val="D9CC99"/>
-            </a:solidFill>
-            <a:prstDash val="dash"/>
-          </a:ln>
-        </p:spPr>
-      </p:sp>
-      <p:sp>
-        <p:nvSpPr>
-          <p:cNvPr id="40" name="Text 33"/>
-          <p:cNvSpPr txBox="1"/>
-          <p:nvPr/>
-        </p:nvSpPr>
-        <p:spPr>
-          <a:xfrm>
-            <a:off x="5257800" y="6364224"/>
-            <a:ext cx="1993392" cy="219456"/>
-          </a:xfrm>
-          <a:prstGeom prst="rect">
-            <a:avLst/>
-          </a:prstGeom>
-          <a:noFill/>
-          <a:ln/>
-        </p:spPr>
-        <p:txBody>
-          <a:bodyPr wrap="square" lIns="0" tIns="0" rIns="0" bIns="0" rtlCol="0" anchor="ctr"/>
-          <a:lstStyle/>
-          <a:p>
-            <a:pPr indent="0" marL="0">
-              <a:buNone/>
-            </a:pPr>
-            <a:r>
-              <a:rPr lang="en-US" sz="1000" dirty="0">
-                <a:solidFill>
-                  <a:srgbClr val="9A8A55"/>
-                </a:solidFill>
-              </a:rPr>
-              <a:t>ちがうところ</a:t>
-            </a:r>
-            <a:endParaRPr lang="en-US" sz="1000" dirty="0"/>
-          </a:p>
-        </p:txBody>
       </p:sp>
     </p:spTree>
   </p:cSld>
